--- a/docs/presentation/slides-byeonghu.pptx
+++ b/docs/presentation/slides-byeonghu.pptx
@@ -701,7 +701,7 @@
           <a:lstStyle/>
           <a:p>
             <a:r>
-              <a:t>전체 구성입니다. 왼쪽 웹 PC 에는 브로커 · FastAPI · DB · Spring 이 Docker 로 돌고, 화면은 React 입니다. 가운데 메인 PC 에서 ROS 2 노드 다섯 개가 돌고, 오른쪽 로봇 컨트롤러와는 두산 드라이버를 거쳐 robot_manager 만 통신합니다. 핵심은 빨간 선입니다 — 접촉 판정과 안전 정지는 웹을 거치지 않고 메인 PC 안에서 끝나서, 웹이 끊겨도 로봇은 멈출 수 있습니다. 주황 점선은 연휴에 더한 용접 부분으로, 구현은 아직 진행 중입니다.</a:t>
+              <a:t>전체 구성입니다. 왼쪽 웹 PC 에는 브로커 · FastAPI · DB · Spring 이 Docker 로 돌고, 화면은 React 입니다. 가운데 메인 PC 에서 ROS 2 노드 다섯 개가 돌고, 로봇에 명령을 내리는 것은 robot_manager 하나뿐이고, 두산 드라이버를 거쳐 오른쪽 로봇 컨트롤러로 갑니다. 핵심은 빨간 선입니다 — 접촉 판정과 안전 정지는 웹을 거치지 않고 메인 PC 안에서 끝나서, 웹이 끊겨도 로봇은 멈출 수 있습니다. 주황 점선은 연휴에 더한 용접 부분으로, 구현은 아직 진행 중입니다.</a:t>
             </a:r>
           </a:p>
           <a:p>
@@ -851,7 +851,7 @@
           <a:lstStyle/>
           <a:p>
             <a:r>
-              <a:t>두 번째 장은 다섯 점으로 형상을 만드는 방법입니다. 탐침이 모서리를 넘어가 팁이 살짝 내려앉는 순간에 "모서리"로 판정하기 때문에, 판정 좌표는 실제 모서리보다 바깥에 찍힙니다. 그래서 팁 반지름과 내려앉은 깊이로 그 거리를 계산해 되돌립니다 — 9/23 실기에서는 방향마다 1.3 mm 안팎이었습니다. 보정한 결과는 캘리퍼 대비 폭 +1.50, 길이 −0.36, 높이 +0.26 mm 로 목표 ±3 mm 안이었습니다. 다만 한 번 잰 값이고, 10 회 반복성은 아직 재지 않았습니다.</a:t>
+              <a:t>두 번째 장은 다섯 점으로 형상을 만드는 방법입니다. 탐침이 모서리를 넘어가 팁이 살짝 내려앉는 순간에 "모서리"로 판정하기 때문에, 판정 좌표는 실제 모서리보다 바깥에 찍힙니다. 그래서 팁 반지름과 내려앉은 깊이로 그 거리를 계산해 되돌립니다 — 9/23 실기에서는 방향마다 1.3 mm 안팎이었습니다. 보정한 결과는 캘리퍼 대비 폭 +1.50, 길이 −0.36, 높이 +0.26 mm 로 목표 ±3 mm 안이었습니다. 다만 한 번 잰 값이고, 10 회 반복성은 아직 재지 않았습니다. 보정된 윗면 사각형의 네 변이 경로 후보이고, 용접 이음을 판정한 것은 아닙니다.</a:t>
             </a:r>
           </a:p>
           <a:p>
@@ -926,7 +926,7 @@
           <a:lstStyle/>
           <a:p>
             <a:r>
-              <a:t>평가 기준 다섯 항목에 저희가 한 것과 증거를 붙였습니다. 기능은 교시 없이 형상까지 나오고 치수는 목표 안이지만, 탐색 시간은 438 초로 목표의 3.6 배이고, 검출 하중은 평균만 보면 통과지만 열 번 중 두 번이 5 N 을 넘어 미달로 적었습니다. 관제 반영 지연도 최대 312 ms 로 미달이고, 중지 반응 시간은 sim 에서만 쟀습니다. 실기에서 웹까지 이어지는 종단은 성공했지만 몇 번 연속인지는 기록이 없어 쓰지 않았습니다. 자세한 수치는 앞의 KPI 장에 있습니다.</a:t>
+              <a:t>평가 기준 다섯 항목에 저희가 한 것과 증거를 붙였습니다. 기능은 교시 없이 형상까지 나오고 치수는 목표 안이지만, 설정 등록은 화면 버튼이 아직 없고, 탐색 시간은 마무리 복귀까지 포함해 438 초로 목표의 3.6 배이며, 검출 하중은 평균만 보면 통과지만 열 번 중 두 번이 5 N 을 넘어 미달로 적었습니다. 관제 반영 지연도 최대 312 ms 로 미달이고, 중지 반응 시간은 sim 에서만 쟀습니다. 실기에서 웹까지 이어지는 종단은 성공했지만 몇 번 연속인지는 기록이 없어 쓰지 않았습니다. 자세한 수치는 앞의 KPI 장에 있습니다.</a:t>
             </a:r>
           </a:p>
           <a:p>
@@ -8136,7 +8136,7 @@
         </p:nvGraphicFramePr>
         <p:xfrm>
           <a:off x="457200" y="2286000"/>
-          <a:ext cx="6675120" cy="2834640"/>
+          <a:ext cx="6675120" cy="3291840"/>
         </p:xfrm>
         <a:graphic>
           <a:graphicData uri="http://schemas.openxmlformats.org/drawingml/2006/table">
@@ -8149,7 +8149,7 @@
                 <a:gridCol w="3703320"/>
                 <a:gridCol w="1188720"/>
               </a:tblGrid>
-              <a:tr h="566928">
+              <a:tr h="658368">
                 <a:tc>
                   <a:txBody>
                     <a:bodyPr wrap="square"/>
@@ -8217,7 +8217,7 @@
                   </a:tcPr>
                 </a:tc>
               </a:tr>
-              <a:tr h="566928">
+              <a:tr h="658368">
                 <a:tc>
                   <a:txBody>
                     <a:bodyPr wrap="square"/>
@@ -8285,7 +8285,7 @@
                   </a:tcPr>
                 </a:tc>
               </a:tr>
-              <a:tr h="566928">
+              <a:tr h="658368">
                 <a:tc>
                   <a:txBody>
                     <a:bodyPr wrap="square"/>
@@ -8353,7 +8353,7 @@
                   </a:tcPr>
                 </a:tc>
               </a:tr>
-              <a:tr h="566928">
+              <a:tr h="658368">
                 <a:tc>
                   <a:txBody>
                     <a:bodyPr wrap="square"/>
@@ -8421,7 +8421,7 @@
                   </a:tcPr>
                 </a:tc>
               </a:tr>
-              <a:tr h="566928">
+              <a:tr h="658368">
                 <a:tc>
                   <a:txBody>
                     <a:bodyPr wrap="square"/>
@@ -8496,61 +8496,6 @@
       <p:sp>
         <p:nvSpPr>
           <p:cNvPr id="34" name="TextBox 33"/>
-          <p:cNvSpPr txBox="1"/>
-          <p:nvPr/>
-        </p:nvSpPr>
-        <p:spPr>
-          <a:xfrm>
-            <a:off x="457200" y="5257800"/>
-            <a:ext cx="6675120" cy="822960"/>
-          </a:xfrm>
-          <a:prstGeom prst="rect">
-            <a:avLst/>
-          </a:prstGeom>
-          <a:noFill/>
-        </p:spPr>
-        <p:txBody>
-          <a:bodyPr wrap="square" anchor="t" tIns="54864" bIns="54864">
-            <a:spAutoFit/>
-          </a:bodyPr>
-          <a:lstStyle/>
-          <a:p>
-            <a:pPr algn="l">
-              <a:spcAft>
-                <a:spcPts val="400"/>
-              </a:spcAft>
-            </a:pPr>
-            <a:r>
-              <a:rPr sz="1150" b="1">
-                <a:solidFill>
-                  <a:srgbClr val="3378C8"/>
-                </a:solidFill>
-                <a:latin typeface="맑은 고딕"/>
-              </a:rPr>
-              <a:t>가설: 다품종 소량 중소 제조사에서 "품종 교체 시 재티칭"이 협동로봇 용접의 가장 큰 운영 비용이다.</a:t>
-            </a:r>
-          </a:p>
-          <a:p>
-            <a:pPr algn="l">
-              <a:spcAft>
-                <a:spcPts val="400"/>
-              </a:spcAft>
-            </a:pPr>
-            <a:r>
-              <a:rPr sz="1050" b="0">
-                <a:solidFill>
-                  <a:srgbClr val="7F7F7F"/>
-                </a:solidFill>
-                <a:latin typeface="맑은 고딕"/>
-              </a:rPr>
-              <a:t>한계: 셋업을 15~30 분에 바꾼다는 업계 주장도 있어, 1 회 티칭 시간은 사실로 단정하지 않고 가정값으로 둔다(E13).</a:t>
-            </a:r>
-          </a:p>
-        </p:txBody>
-      </p:sp>
-      <p:sp>
-        <p:nvSpPr>
-          <p:cNvPr id="35" name="TextBox 34"/>
           <p:cNvSpPr txBox="1"/>
           <p:nvPr/>
         </p:nvSpPr>
@@ -8578,7 +8523,7 @@
               </a:spcAft>
             </a:pPr>
             <a:r>
-              <a:rPr sz="1400" b="1">
+              <a:rPr sz="1350" b="1">
                 <a:solidFill>
                   <a:srgbClr val="3378C8"/>
                 </a:solidFill>
@@ -8594,13 +8539,13 @@
               </a:spcAft>
             </a:pPr>
             <a:r>
-              <a:rPr sz="1250" b="0">
+              <a:rPr sz="1200" b="0">
                 <a:solidFill>
                   <a:srgbClr val="262626"/>
                 </a:solidFill>
                 <a:latin typeface="맑은 고딕"/>
               </a:rPr>
-              <a:t>· 문제: 협동로봇 용접은 끝단을 잡고 점을 기록하는 직접교시에 의존한다. 품종이 바뀌면 다시 한다</a:t>
+              <a:t>· 문제 · 배경: 협동로봇 용접은 끝단을 잡고 점을 기록하는 직접교시에 의존하고, 품종이 바뀌면 다시 한다. 뿌리산업 종사자 68.2 % 가 40 대 이상, 10 인 미만 업체 89.3 % 가 인력 부족(E2 · E3)</a:t>
             </a:r>
           </a:p>
           <a:p>
@@ -8610,13 +8555,13 @@
               </a:spcAft>
             </a:pPr>
             <a:r>
-              <a:rPr sz="1250" b="0">
+              <a:rPr sz="1200" b="0">
                 <a:solidFill>
                   <a:srgbClr val="262626"/>
                 </a:solidFill>
                 <a:latin typeface="맑은 고딕"/>
               </a:rPr>
-              <a:t>· 배경: 뿌리산업 종사자 68.2 % 가 40 대 이상, 10 인 미만 업체 89.3 % 가 인력 부족(E2 · E3)</a:t>
+              <a:t>· 가설: 다품종 소량 중소 제조사에서 "품종 교체 시 재티칭"이 가장 큰 운영 비용이다. 단, 셋업을 15~30 분에 바꾼다는 주장도 있어 티칭 시간은 가정값으로 둔다(E13)</a:t>
             </a:r>
           </a:p>
           <a:p>
@@ -8626,7 +8571,7 @@
               </a:spcAft>
             </a:pPr>
             <a:r>
-              <a:rPr sz="1250" b="0">
+              <a:rPr sz="1200" b="0">
                 <a:solidFill>
                   <a:srgbClr val="262626"/>
                 </a:solidFill>
@@ -8639,7 +8584,7 @@
       </p:sp>
       <p:sp>
         <p:nvSpPr>
-          <p:cNvPr id="36" name="출처 각주"/>
+          <p:cNvPr id="35" name="출처 각주"/>
           <p:cNvSpPr txBox="1"/>
           <p:nvPr/>
         </p:nvSpPr>
@@ -20888,7 +20833,7 @@
         </p:nvGraphicFramePr>
         <p:xfrm>
           <a:off x="7498079" y="2286000"/>
-          <a:ext cx="4233672" cy="3072384"/>
+          <a:ext cx="4233672" cy="3840480"/>
         </p:xfrm>
         <a:graphic>
           <a:graphicData uri="http://schemas.openxmlformats.org/drawingml/2006/table">
@@ -20901,7 +20846,7 @@
                 <a:gridCol w="1581912"/>
                 <a:gridCol w="1051560"/>
               </a:tblGrid>
-              <a:tr h="512064">
+              <a:tr h="548640">
                 <a:tc>
                   <a:txBody>
                     <a:bodyPr wrap="square"/>
@@ -20969,7 +20914,7 @@
                   </a:tcPr>
                 </a:tc>
               </a:tr>
-              <a:tr h="512064">
+              <a:tr h="548640">
                 <a:tc>
                   <a:txBody>
                     <a:bodyPr wrap="square"/>
@@ -21037,7 +20982,7 @@
                   </a:tcPr>
                 </a:tc>
               </a:tr>
-              <a:tr h="512064">
+              <a:tr h="548640">
                 <a:tc>
                   <a:txBody>
                     <a:bodyPr wrap="square"/>
@@ -21105,7 +21050,7 @@
                   </a:tcPr>
                 </a:tc>
               </a:tr>
-              <a:tr h="512064">
+              <a:tr h="548640">
                 <a:tc>
                   <a:txBody>
                     <a:bodyPr wrap="square"/>
@@ -21184,7 +21129,7 @@
                   </a:tcPr>
                 </a:tc>
               </a:tr>
-              <a:tr h="512064">
+              <a:tr h="548640">
                 <a:tc>
                   <a:txBody>
                     <a:bodyPr wrap="square"/>
@@ -21263,7 +21208,7 @@
                   </a:tcPr>
                 </a:tc>
               </a:tr>
-              <a:tr h="512064">
+              <a:tr h="548640">
                 <a:tc>
                   <a:txBody>
                     <a:bodyPr wrap="square"/>
@@ -21331,68 +21276,81 @@
                   </a:tcPr>
                 </a:tc>
               </a:tr>
+              <a:tr h="548640">
+                <a:tc>
+                  <a:txBody>
+                    <a:bodyPr wrap="square"/>
+                    <a:lstStyle/>
+                    <a:p>
+                      <a:r>
+                        <a:rPr sz="1050" b="1">
+                          <a:solidFill>
+                            <a:srgbClr val="262626"/>
+                          </a:solidFill>
+                          <a:latin typeface="맑은 고딕"/>
+                        </a:rPr>
+                        <a:t>보정 입력</a:t>
+                      </a:r>
+                    </a:p>
+                  </a:txBody>
+                  <a:tcPr marL="54864" marR="54864" marT="27432" marB="27432" anchor="ctr">
+                    <a:solidFill>
+                      <a:srgbClr val="F2F5FA"/>
+                    </a:solidFill>
+                  </a:tcPr>
+                </a:tc>
+                <a:tc>
+                  <a:txBody>
+                    <a:bodyPr wrap="square"/>
+                    <a:lstStyle/>
+                    <a:p>
+                      <a:r>
+                        <a:rPr sz="1050" b="0">
+                          <a:solidFill>
+                            <a:srgbClr val="262626"/>
+                          </a:solidFill>
+                          <a:latin typeface="맑은 고딕"/>
+                        </a:rPr>
+                        <a:t>r 2 mm · t 0 · R 0</a:t>
+                      </a:r>
+                    </a:p>
+                  </a:txBody>
+                  <a:tcPr marL="54864" marR="54864" marT="27432" marB="27432" anchor="ctr">
+                    <a:solidFill>
+                      <a:srgbClr val="F2F5FA"/>
+                    </a:solidFill>
+                  </a:tcPr>
+                </a:tc>
+                <a:tc>
+                  <a:txBody>
+                    <a:bodyPr wrap="square"/>
+                    <a:lstStyle/>
+                    <a:p>
+                      <a:r>
+                        <a:rPr sz="1050" b="0">
+                          <a:solidFill>
+                            <a:srgbClr val="262626"/>
+                          </a:solidFill>
+                          <a:latin typeface="맑은 고딕"/>
+                        </a:rPr>
+                        <a:t>설정값</a:t>
+                      </a:r>
+                    </a:p>
+                  </a:txBody>
+                  <a:tcPr marL="54864" marR="54864" marT="27432" marB="27432" anchor="ctr">
+                    <a:solidFill>
+                      <a:srgbClr val="F2F5FA"/>
+                    </a:solidFill>
+                  </a:tcPr>
+                </a:tc>
+              </a:tr>
             </a:tbl>
           </a:graphicData>
         </a:graphic>
       </p:graphicFrame>
       <p:sp>
         <p:nvSpPr>
-          <p:cNvPr id="102" name="TextBox 101"/>
-          <p:cNvSpPr txBox="1"/>
-          <p:nvPr/>
-        </p:nvSpPr>
-        <p:spPr>
-          <a:xfrm>
-            <a:off x="7498079" y="5440680"/>
-            <a:ext cx="4233672" cy="822960"/>
-          </a:xfrm>
-          <a:prstGeom prst="rect">
-            <a:avLst/>
-          </a:prstGeom>
-          <a:noFill/>
-        </p:spPr>
-        <p:txBody>
-          <a:bodyPr wrap="square" anchor="t" tIns="54864" bIns="54864">
-            <a:spAutoFit/>
-          </a:bodyPr>
-          <a:lstStyle/>
-          <a:p>
-            <a:pPr algn="l">
-              <a:spcAft>
-                <a:spcPts val="400"/>
-              </a:spcAft>
-            </a:pPr>
-            <a:r>
-              <a:rPr sz="1050" b="0">
-                <a:solidFill>
-                  <a:srgbClr val="262626"/>
-                </a:solidFill>
-                <a:latin typeface="맑은 고딕"/>
-              </a:rPr>
-              <a:t>· 탐침 팁 r 2 mm · 판정 지연 t 0 · 모서리 둥글림 R 0 (설정값)</a:t>
-            </a:r>
-          </a:p>
-          <a:p>
-            <a:pPr algn="l">
-              <a:spcAft>
-                <a:spcPts val="400"/>
-              </a:spcAft>
-            </a:pPr>
-            <a:r>
-              <a:rPr sz="1050" b="0">
-                <a:solidFill>
-                  <a:srgbClr val="262626"/>
-                </a:solidFill>
-                <a:latin typeface="맑은 고딕"/>
-              </a:rPr>
-              <a:t>· 경로 후보 4 = 보정된 윗면 사각형의 네 변 (용접 이음 판정 아님)</a:t>
-            </a:r>
-          </a:p>
-        </p:txBody>
-      </p:sp>
-      <p:sp>
-        <p:nvSpPr>
-          <p:cNvPr id="103" name="출처 각주"/>
+          <p:cNvPr id="102" name="출처 각주"/>
           <p:cNvSpPr txBox="1"/>
           <p:nvPr/>
         </p:nvSpPr>
@@ -22150,8 +22108,8 @@
           <p:nvPr/>
         </p:nvGraphicFramePr>
         <p:xfrm>
-          <a:off x="457200" y="2240280"/>
-          <a:ext cx="11274552" cy="3950208"/>
+          <a:off x="457200" y="2212848"/>
+          <a:ext cx="11274552" cy="3621024"/>
         </p:xfrm>
         <a:graphic>
           <a:graphicData uri="http://schemas.openxmlformats.org/drawingml/2006/table">
@@ -22160,18 +22118,18 @@
                 <a:tableStyleId>{5C22544A-7EE6-4342-B048-85BDC9FD1C3A}</a:tableStyleId>
               </a:tblPr>
               <a:tblGrid>
-                <a:gridCol w="1417320"/>
-                <a:gridCol w="6309360"/>
-                <a:gridCol w="3547872"/>
+                <a:gridCol w="1325880"/>
+                <a:gridCol w="6492240"/>
+                <a:gridCol w="3456432"/>
               </a:tblGrid>
-              <a:tr h="658368">
+              <a:tr h="603504">
                 <a:tc>
                   <a:txBody>
                     <a:bodyPr wrap="square"/>
                     <a:lstStyle/>
                     <a:p>
                       <a:r>
-                        <a:rPr sz="1000" b="1">
+                        <a:rPr sz="950" b="1">
                           <a:solidFill>
                             <a:srgbClr val="FFFFFF"/>
                           </a:solidFill>
@@ -22193,7 +22151,7 @@
                     <a:lstStyle/>
                     <a:p>
                       <a:r>
-                        <a:rPr sz="1000" b="1">
+                        <a:rPr sz="950" b="1">
                           <a:solidFill>
                             <a:srgbClr val="FFFFFF"/>
                           </a:solidFill>
@@ -22215,7 +22173,7 @@
                     <a:lstStyle/>
                     <a:p>
                       <a:r>
-                        <a:rPr sz="1000" b="1">
+                        <a:rPr sz="950" b="1">
                           <a:solidFill>
                             <a:srgbClr val="FFFFFF"/>
                           </a:solidFill>
@@ -22232,14 +22190,14 @@
                   </a:tcPr>
                 </a:tc>
               </a:tr>
-              <a:tr h="658368">
+              <a:tr h="603504">
                 <a:tc>
                   <a:txBody>
                     <a:bodyPr wrap="square"/>
                     <a:lstStyle/>
                     <a:p>
                       <a:r>
-                        <a:rPr sz="1000" b="1">
+                        <a:rPr sz="950" b="1">
                           <a:solidFill>
                             <a:srgbClr val="262626"/>
                           </a:solidFill>
@@ -22250,7 +22208,7 @@
                     </a:p>
                     <a:p>
                       <a:r>
-                        <a:rPr sz="1000" b="1">
+                        <a:rPr sz="950" b="1">
                           <a:solidFill>
                             <a:srgbClr val="262626"/>
                           </a:solidFill>
@@ -22272,13 +22230,13 @@
                     <a:lstStyle/>
                     <a:p>
                       <a:r>
-                        <a:rPr sz="1000" b="0">
+                        <a:rPr sz="950" b="0">
                           <a:solidFill>
                             <a:srgbClr val="262626"/>
                           </a:solidFill>
                           <a:latin typeface="맑은 고딕"/>
                         </a:rPr>
-                        <a:t>교시 없이 5 점 → 직육면체 · 외곽 엣지 · 경로 후보 4 → 웹 3D. 버튼 6 개(시작 · 중지 · 안전복귀 · 재시작 · 설정 · 안전 해제). 단, 전체 탐색 438 s 로 KPI 120 s 미달</a:t>
+                        <a:t>교시 없이 5 점 → 직육면체 · 외곽 엣지 · 경로 후보 4 → 웹 3D. 버튼 5 개(시작 · 중지 · 안전복귀 · 재시작 · 안전 해제), 설정 등록은 화면 버튼 미구현. 전체 탐색 438 s 로 KPI 120 s 미달</a:t>
                       </a:r>
                     </a:p>
                   </a:txBody>
@@ -22294,7 +22252,7 @@
                     <a:lstStyle/>
                     <a:p>
                       <a:r>
-                        <a:rPr sz="1000" b="0">
+                        <a:rPr sz="950" b="0">
                           <a:solidFill>
                             <a:srgbClr val="262626"/>
                           </a:solidFill>
@@ -22311,14 +22269,14 @@
                   </a:tcPr>
                 </a:tc>
               </a:tr>
-              <a:tr h="658368">
+              <a:tr h="603504">
                 <a:tc>
                   <a:txBody>
                     <a:bodyPr wrap="square"/>
                     <a:lstStyle/>
                     <a:p>
                       <a:r>
-                        <a:rPr sz="1000" b="1">
+                        <a:rPr sz="950" b="1">
                           <a:solidFill>
                             <a:srgbClr val="262626"/>
                           </a:solidFill>
@@ -22329,7 +22287,7 @@
                     </a:p>
                     <a:p>
                       <a:r>
-                        <a:rPr sz="1000" b="1">
+                        <a:rPr sz="950" b="1">
                           <a:solidFill>
                             <a:srgbClr val="262626"/>
                           </a:solidFill>
@@ -22351,7 +22309,7 @@
                     <a:lstStyle/>
                     <a:p>
                       <a:r>
-                        <a:rPr sz="1000" b="0">
+                        <a:rPr sz="950" b="0">
                           <a:solidFill>
                             <a:srgbClr val="262626"/>
                           </a:solidFill>
@@ -22373,7 +22331,7 @@
                     <a:lstStyle/>
                     <a:p>
                       <a:r>
-                        <a:rPr sz="1000" b="0">
+                        <a:rPr sz="950" b="0">
                           <a:solidFill>
                             <a:srgbClr val="262626"/>
                           </a:solidFill>
@@ -22390,14 +22348,14 @@
                   </a:tcPr>
                 </a:tc>
               </a:tr>
-              <a:tr h="658368">
+              <a:tr h="603504">
                 <a:tc>
                   <a:txBody>
                     <a:bodyPr wrap="square"/>
                     <a:lstStyle/>
                     <a:p>
                       <a:r>
-                        <a:rPr sz="1000" b="1">
+                        <a:rPr sz="950" b="1">
                           <a:solidFill>
                             <a:srgbClr val="262626"/>
                           </a:solidFill>
@@ -22408,7 +22366,7 @@
                     </a:p>
                     <a:p>
                       <a:r>
-                        <a:rPr sz="1000" b="1">
+                        <a:rPr sz="950" b="1">
                           <a:solidFill>
                             <a:srgbClr val="262626"/>
                           </a:solidFill>
@@ -22430,7 +22388,7 @@
                     <a:lstStyle/>
                     <a:p>
                       <a:r>
-                        <a:rPr sz="1000" b="0">
+                        <a:rPr sz="950" b="0">
                           <a:solidFill>
                             <a:srgbClr val="262626"/>
                           </a:solidFill>
@@ -22452,7 +22410,7 @@
                     <a:lstStyle/>
                     <a:p>
                       <a:r>
-                        <a:rPr sz="1000" b="0">
+                        <a:rPr sz="950" b="0">
                           <a:solidFill>
                             <a:srgbClr val="262626"/>
                           </a:solidFill>
@@ -22469,14 +22427,14 @@
                   </a:tcPr>
                 </a:tc>
               </a:tr>
-              <a:tr h="658368">
+              <a:tr h="603504">
                 <a:tc>
                   <a:txBody>
                     <a:bodyPr wrap="square"/>
                     <a:lstStyle/>
                     <a:p>
                       <a:r>
-                        <a:rPr sz="1000" b="1">
+                        <a:rPr sz="950" b="1">
                           <a:solidFill>
                             <a:srgbClr val="262626"/>
                           </a:solidFill>
@@ -22487,7 +22445,7 @@
                     </a:p>
                     <a:p>
                       <a:r>
-                        <a:rPr sz="1000" b="1">
+                        <a:rPr sz="950" b="1">
                           <a:solidFill>
                             <a:srgbClr val="262626"/>
                           </a:solidFill>
@@ -22509,7 +22467,7 @@
                     <a:lstStyle/>
                     <a:p>
                       <a:r>
-                        <a:rPr sz="1000" b="0">
+                        <a:rPr sz="950" b="0">
                           <a:solidFill>
                             <a:srgbClr val="262626"/>
                           </a:solidFill>
@@ -22531,13 +22489,13 @@
                     <a:lstStyle/>
                     <a:p>
                       <a:r>
-                        <a:rPr sz="1000" b="0">
+                        <a:rPr sz="950" b="0">
                           <a:solidFill>
                             <a:srgbClr val="262626"/>
                           </a:solidFill>
                           <a:latin typeface="맑은 고딕"/>
                         </a:rPr>
-                        <a:t>04-① · 04-⑤ · 산출물 05 · 06 · TR-10(9/22, 저장 · 조회 PASS)</a:t>
+                        <a:t>04-① · 04-⑤ · 산출물 05 · 06 · TR-10(9/22 sim, 저장 · 조회 PASS)</a:t>
                       </a:r>
                     </a:p>
                   </a:txBody>
@@ -22548,14 +22506,14 @@
                   </a:tcPr>
                 </a:tc>
               </a:tr>
-              <a:tr h="658368">
+              <a:tr h="603504">
                 <a:tc>
                   <a:txBody>
                     <a:bodyPr wrap="square"/>
                     <a:lstStyle/>
                     <a:p>
                       <a:r>
-                        <a:rPr sz="1000" b="1">
+                        <a:rPr sz="950" b="1">
                           <a:solidFill>
                             <a:srgbClr val="262626"/>
                           </a:solidFill>
@@ -22566,7 +22524,7 @@
                     </a:p>
                     <a:p>
                       <a:r>
-                        <a:rPr sz="1000" b="1">
+                        <a:rPr sz="950" b="1">
                           <a:solidFill>
                             <a:srgbClr val="262626"/>
                           </a:solidFill>
@@ -22588,7 +22546,7 @@
                     <a:lstStyle/>
                     <a:p>
                       <a:r>
-                        <a:rPr sz="1000" b="0">
+                        <a:rPr sz="950" b="0">
                           <a:solidFill>
                             <a:srgbClr val="262626"/>
                           </a:solidFill>
@@ -22610,7 +22568,7 @@
                     <a:lstStyle/>
                     <a:p>
                       <a:r>
-                        <a:rPr sz="1000" b="0">
+                        <a:rPr sz="950" b="0">
                           <a:solidFill>
                             <a:srgbClr val="262626"/>
                           </a:solidFill>
@@ -22640,7 +22598,7 @@
           <p:nvPr/>
         </p:nvGraphicFramePr>
         <p:xfrm>
-          <a:off x="457200" y="5961888"/>
+          <a:off x="457200" y="6016752"/>
           <a:ext cx="11274552" cy="384048"/>
         </p:xfrm>
         <a:graphic>
@@ -22650,9 +22608,9 @@
                 <a:tableStyleId>{5C22544A-7EE6-4342-B048-85BDC9FD1C3A}</a:tableStyleId>
               </a:tblPr>
               <a:tblGrid>
-                <a:gridCol w="1417320"/>
-                <a:gridCol w="6309360"/>
-                <a:gridCol w="3547872"/>
+                <a:gridCol w="1325880"/>
+                <a:gridCol w="6492240"/>
+                <a:gridCol w="3456432"/>
               </a:tblGrid>
               <a:tr h="384048">
                 <a:tc>
@@ -22760,7 +22718,7 @@
                 </a:solidFill>
                 <a:latin typeface="맑은 고딕"/>
               </a:rPr>
-              <a:t>출처: docs/deliverables/README.md 5 절 · TR-01_20260923 · TR-05_20260922 · TR-10_20260922 · #180 · PR #179. 장 번호는 목차 기호(04-⑥ = 실기 결과 · KPI)</a:t>
+              <a:t>출처: deliverables README 5 절 · TR-01(9/23) · TR-05(9/22, 설정 버튼 미구현) · TR-10(9/22) · #180 · PR #179. 438 s = 액션 전체(마무리 복귀 포함)</a:t>
             </a:r>
           </a:p>
         </p:txBody>
@@ -24723,7 +24681,7 @@
                 </a:solidFill>
                 <a:latin typeface="맑은 고딕"/>
               </a:rPr>
-              <a:t>· 계약 먼저(9/23, v0.2.0): 노드 weld_manager · 타입 7 개 · 사유 코드 600~604 를 더하고, 1차 계약은 고치지 않았다</a:t>
+              <a:t>· 계약 먼저(9/23 초안 · 9/26 머지, v0.2.0): 노드 weld_manager · 타입 7 개 · 사유 코드 600~604 를 더하고, 1차 계약은 고치지 않았다</a:t>
             </a:r>
           </a:p>
           <a:p>
@@ -25682,7 +25640,7 @@
                           </a:solidFill>
                           <a:latin typeface="맑은 고딕"/>
                         </a:rPr>
-                        <a:t>16 자세 중 12 도달. L1 · L5 는 도달 불가(플랜지 761 · 762 mm). 도달 자세 위치 오차 최대 0.14 mm</a:t>
+                        <a:t>16 자세 중 12 도달, L1 · L5 는 도달 불가(플랜지 761 · 762 mm). 위치 오차 최대 0.14 mm. 세로 아래 4 자세는 계약 z 보다 17 mm 위에서 확인(계약 z 는 9/29)</a:t>
                       </a:r>
                     </a:p>
                   </a:txBody>
@@ -27495,7 +27453,7 @@
                 </a:solidFill>
                 <a:latin typeface="맑은 고딕"/>
               </a:rPr>
-              <a:t>· 탐색 438 s(KPI 120 s) · 검출 하중 2/10 초과 · 반영 지연 312 ms</a:t>
+              <a:t>· 탐색 438 s(KPI 120 s) · 검출 하중 2/10 초과 · 반영 지연 312 ms · 설정 등록 버튼 미구현</a:t>
             </a:r>
           </a:p>
           <a:p>

--- a/docs/presentation/slides-byeonghu.pptx
+++ b/docs/presentation/slides-byeonghu.pptx
@@ -781,7 +781,7 @@
           </a:p>
           <a:p>
             <a:r>
-              <a:t>(세부: 상태 이름 = PREPARING → TOP_SEARCH → EDGE_SEARCH ×4 → GEOMETRY → HOMING → DONE, 중지 = STOPPING → STOPPED, 실패 = ERROR. 재시작은 기록(progress.json)만 보고 잇는다 — 프로세스가 죽었다 떠도 같은 자리에서(sim · 시험으로 확인, 실기 미실시). 오류 뒤 재시작은 v0.1.21 부터 SAMPLE_STALE 403 · ROBOT_STATUS_LOST 404 · STOP_UNCONFIRMED 407 만, /safety/reset 뒤에 받는다. 안전복귀는 손상 의심(400 · 205 · 402)이나 위치 불명이면 멈추고 사람이 조그한다. 출처: README · 계약)</a:t>
+              <a:t>(세부: 상태 이름 = PREPARING → TOP_SEARCH → EDGE_SEARCH ×4 → GEOMETRY → HOMING → DONE, 중지 = STOPPING → STOPPED, 실패 = ERROR. 재시작은 기록(progress.json)만 보고 잇는다 — 중지한 뒤 프로세스를 다시 띄워도 같은 자리에서(sim 시험, 실기 미실시). 스캔 도중 프로세스가 죽으면 멈춘 자리를 몰라 잇지 않는다(NO_RESUMABLE_SCAN). 오류 뒤 재시작은 v0.1.21 부터 SAMPLE_STALE 403 · ROBOT_STATUS_LOST 404 · STOP_UNCONFIRMED 407 만, /safety/reset 뒤에 받는다. 안전복귀는 손상 의심(400 · 205 · 402)이나 위치 불명이면 멈추고 사람이 조그한다. 출처: README · 계약)</a:t>
             </a:r>
           </a:p>
         </p:txBody>
@@ -931,7 +931,7 @@
           </a:p>
           <a:p>
             <a:r>
-              <a:t>(세부: 검출 하중 평균 4.49 N · 2/10 초과(5.15 · 5.29 N), 중지 반응 706 · 600 ms 는 sim 측정(TR-05), 반영 지연 312 ms FAIL, 저장 · 조회 일치는 TR-10 sim. 실기 종단(9/23)은 성공했지만 연속 회차 기록이 없어 "연속"이라고 쓰지 않는다. 438 s 는 RunScan 액션 전체(마무리 복귀 포함) — KPI 구간은 이보다 수 초 짧다. [합치기 체크] 용접을 빼면 주황 표 "[뺄 수 있음] 04-⑦ 용접 행"만 지운다)</a:t>
+              <a:t>(세부: 검출 하중 평균 4.49 N · 2/10 초과(5.15 · 5.29 N), 중지 반응 706 · 600 ms 는 sim 측정(TR-05), 반영 지연 312 ms FAIL, 저장 · 조회 일치는 TR-10 sim. 실기 종단(9/23)은 성공했지만 연속 회차 기록이 없어 "연속"이라고 쓰지 않는다. 438 s 는 #180 학민 코멘트의 실측(이슈 본문 구간 합계는 435 s). [합치기 체크] 용접을 빼면 주황 표 "[뺄 수 있음] 04-⑦ 용접 행"만 지운다)</a:t>
             </a:r>
           </a:p>
         </p:txBody>
@@ -1896,12 +1896,12 @@
           <a:lstStyle/>
           <a:p>
             <a:r>
-              <a:t>진행 순서는 이 그림과 같습니다. 요구사항에서 계약을 만들고, 계약을 기준으로 네 명이 병렬로 개발했습니다. 검증은 로봇 없이 가상 접촉을 만드는 sim, 두산 에뮬레이터, 그리고 실기 순서로 올라갔고, 결과는 시험 보고서로 남겼습니다. 실기에서 잰 값은 파라미터 파일과 계약 개정으로만 되돌렸는데, 9/18 에 동결한 계약을 9/23 까지 열아홉 번 고쳤습니다.</a:t>
+              <a:t>진행 순서는 이 그림과 같습니다. 요구사항에서 계약을 만들고, 계약을 기준으로 네 명이 병렬로 개발했습니다. 검증은 로봇 없이 가상 접촉을 만드는 sim, 두산 에뮬레이터, 그리고 실기 순서로 올라갔고, 결과는 시험 보고서로 남겼습니다. 실기에서 잰 값은 파라미터 파일과 계약 개정으로만 되돌렸는데, 9/18 에 동결한 계약을 9/23 실기까지 열아홉 번 고쳐 main 에 넣었습니다.</a:t>
             </a:r>
           </a:p>
           <a:p>
             <a:r>
-              <a:t>(세부: 계약이 코드보다 우선이라 이름 · 필드 · 단위가 바뀌면 계약 문서 · 인터페이스 패키지 · 변경 이력을 한 PR 에서 같이 고치고, 둘이 어긋나면 동기화 시험이 CI 에서 실패한다. 입력원은 launch 인자 source:=sim | robot_force 하나로 바꾼다. CHANGELOG 는 v0.1.1 ~ v0.1.20 의 19 항목(v0.1.17 은 번호만 비어 있다))</a:t>
+              <a:t>(세부: 계약이 코드보다 우선이라 이름 · 필드 · 단위가 바뀌면 계약 문서 · 인터페이스 패키지 · 변경 이력을 한 PR 에서 같이 고치고, 둘이 어긋나면 동기화 시험이 CI 에서 실패한다. 입력원은 launch 인자 source:=sim | robot_force 하나로 바꾼다. CHANGELOG 는 v0.1.1 ~ v0.1.20 의 19 항목(v0.1.17 은 번호만 비어 있다). v0.1.21 도 9/23 날짜로 적혔지만 main 머지는 9/27 이라 세지 않았다)</a:t>
             </a:r>
           </a:p>
         </p:txBody>
@@ -9554,7 +9554,7 @@
         <p:spPr>
           <a:xfrm>
             <a:off x="457200" y="2240280"/>
-            <a:ext cx="7406640" cy="3969245"/>
+            <a:ext cx="7589520" cy="4067251"/>
           </a:xfrm>
           <a:prstGeom prst="rect">
             <a:avLst/>
@@ -9569,8 +9569,8 @@
         </p:nvSpPr>
         <p:spPr>
           <a:xfrm>
-            <a:off x="8092440" y="2286000"/>
-            <a:ext cx="3639312" cy="1188720"/>
+            <a:off x="8183879" y="2286000"/>
+            <a:ext cx="3547872" cy="1188720"/>
           </a:xfrm>
           <a:prstGeom prst="roundRect">
             <a:avLst>
@@ -9648,8 +9648,8 @@
         </p:nvSpPr>
         <p:spPr>
           <a:xfrm>
-            <a:off x="8092440" y="3611880"/>
-            <a:ext cx="3639312" cy="1188720"/>
+            <a:off x="8183879" y="3611880"/>
+            <a:ext cx="3547872" cy="1188720"/>
           </a:xfrm>
           <a:prstGeom prst="roundRect">
             <a:avLst>
@@ -9727,8 +9727,8 @@
         </p:nvSpPr>
         <p:spPr>
           <a:xfrm>
-            <a:off x="8092440" y="4937760"/>
-            <a:ext cx="3639312" cy="1188720"/>
+            <a:off x="8183879" y="4937760"/>
+            <a:ext cx="3547872" cy="1188720"/>
           </a:xfrm>
           <a:prstGeom prst="roundRect">
             <a:avLst>
@@ -12735,7 +12735,7 @@
               </a:spcAft>
             </a:pPr>
             <a:r>
-              <a:rPr sz="1200" b="0">
+              <a:rPr sz="1300" b="0">
                 <a:solidFill>
                   <a:srgbClr val="7F7F7F"/>
                 </a:solidFill>
@@ -12968,7 +12968,7 @@
               </a:spcAft>
             </a:pPr>
             <a:r>
-              <a:rPr sz="1200" b="0">
+              <a:rPr sz="1300" b="0">
                 <a:solidFill>
                   <a:srgbClr val="7F7F7F"/>
                 </a:solidFill>
@@ -13252,7 +13252,7 @@
               </a:spcAft>
             </a:pPr>
             <a:r>
-              <a:rPr sz="1200" b="0">
+              <a:rPr sz="1300" b="0">
                 <a:solidFill>
                   <a:srgbClr val="7F7F7F"/>
                 </a:solidFill>
@@ -13519,7 +13519,7 @@
               </a:spcAft>
             </a:pPr>
             <a:r>
-              <a:rPr sz="1200" b="0">
+              <a:rPr sz="1300" b="0">
                 <a:solidFill>
                   <a:srgbClr val="7F7F7F"/>
                 </a:solidFill>
@@ -14742,7 +14742,7 @@
                           <a:latin typeface="맑은 고딕"/>
                           <a:ea typeface="맑은 고딕"/>
                         </a:rPr>
-                        <a:t>패키지 5 + 웹</a:t>
+                        <a:t>노드 5 + 웹</a:t>
                       </a:r>
                     </a:p>
                   </a:txBody>
@@ -16097,7 +16097,7 @@
                 <a:latin typeface="맑은 고딕"/>
                 <a:ea typeface="맑은 고딕"/>
               </a:rPr>
-              <a:t>출처: docs/conventions.md · docs/contracts/CHANGELOG.md(v0.1.1 ~ v0.1.20, 9/18~9/23 의 19 항목) · contact_scan_interfaces test_contract_sync</a:t>
+              <a:t>출처: docs/conventions.md · docs/contracts/CHANGELOG.md(v0.1.1 ~ v0.1.20, 9/18~9/23 의 19 항목) · contact_scan_interfaces test_contract_sync. 9/23 main 머지 기준</a:t>
             </a:r>
           </a:p>
         </p:txBody>
@@ -18100,7 +18100,7 @@
       </p:pic>
       <p:pic>
         <p:nvPicPr>
-          <p:cNvPr id="100" name="Picture 99" descr="arch-simple.png"/>
+          <p:cNvPr id="100" name="[뺄 수 있음] 04-① 그림(용접 포함) — 빼면 arch-simple-no-phase2.png" descr="arch-simple.png"/>
           <p:cNvPicPr>
             <a:picLocks noChangeAspect="1"/>
           </p:cNvPicPr>
@@ -21437,7 +21437,7 @@
                           <a:latin typeface="맑은 고딕"/>
                           <a:ea typeface="맑은 고딕"/>
                         </a:rPr>
-                        <a:t>TR-02</a:t>
+                        <a:t>KPI</a:t>
                       </a:r>
                     </a:p>
                   </a:txBody>
@@ -22800,7 +22800,7 @@
                           <a:latin typeface="맑은 고딕"/>
                           <a:ea typeface="맑은 고딕"/>
                         </a:rPr>
-                        <a:t>docs/phase2</a:t>
+                        <a:t>PR #197 (머지 전)</a:t>
                       </a:r>
                     </a:p>
                   </a:txBody>
@@ -22850,7 +22850,7 @@
                 <a:latin typeface="맑은 고딕"/>
                 <a:ea typeface="맑은 고딕"/>
               </a:rPr>
-              <a:t>출처: deliverables README 5 절 · TR-01(9/23) · TR-05(9/22 sim, 설정 버튼 미구현) · TR-10(9/22 sim) · #180 · PR #179. 438 s = 액션 전체</a:t>
+              <a:t>출처: deliverables README 5 절 · TR-01(9/23) · TR-05(9/22 sim, 설정 버튼 미구현) · TR-10(9/22 sim) · #180 · PR #179. 438 s = #180 학민 실측(본문 합계 435 s)</a:t>
             </a:r>
           </a:p>
         </p:txBody>
@@ -24482,7 +24482,7 @@
         <p:spPr>
           <a:xfrm>
             <a:off x="457200" y="2286000"/>
-            <a:ext cx="6858000" cy="3880184"/>
+            <a:ext cx="6949440" cy="3931920"/>
           </a:xfrm>
           <a:prstGeom prst="rect">
             <a:avLst/>
@@ -26116,7 +26116,7 @@
                 <a:latin typeface="맑은 고딕"/>
                 <a:ea typeface="맑은 고딕"/>
               </a:rPr>
-              <a:t>출처: docs/phase2/measurements-20260923.md(M1, 세로 아래 4 자세는 계약 z + 17 mm 에서) · docs/test-reports/p2-weld-virtual_20260925.md(가상 박스 100×60×40 mm, PR #197)</a:t>
+              <a:t>출처: phase2/measurements-20260923.md(M1, 세로 아래 4 자세는 계약 z + 17 mm) · p2-weld-virtual_20260925.md(가상 박스 100×60×40 mm, PR #197 머지 전)</a:t>
             </a:r>
           </a:p>
         </p:txBody>

--- a/docs/presentation/slides-byeonghu.pptx
+++ b/docs/presentation/slides-byeonghu.pptx
@@ -926,12 +926,12 @@
           <a:lstStyle/>
           <a:p>
             <a:r>
-              <a:t>평가 기준 다섯 항목에 저희가 한 것과 증거를 붙였습니다. 동그라미는 된 것, 가위표는 목표에 못 미친 것입니다. 기능은 교시 없이 형상까지 나오고 치수도 목표 안이지만, 탐색 시간은 438 초로 목표의 3.6 배이고 설정 등록 버튼은 아직 화면에 없습니다. 검출 하중은 평균만 보면 통과지만 열 번 중 두 번이 5 N 을 넘어 미달로 적었고, 관제 반영 지연도 최대 312 ms 로 미달입니다. 재시작은 sim 과 시험으로만 확인했습니다.</a:t>
+              <a:t>평가 기준 다섯 항목에 저희가 한 것과 증거를 붙였습니다. 동그라미는 된 것, 가위표는 목표에 못 미친 것입니다. 기능은 교시 없이 형상까지 나오고, 9/23 실기에서는 약 7 분짜리 종단을 세 번 연속 성공했습니다. 치수도 목표 안이지만, 탐색 시간은 438 초로 목표의 3.6 배이고 설정 등록 버튼은 아직 화면에 없습니다. 검출 하중은 평균만 보면 통과지만 열 번 중 두 번이 5 N 을 넘어 미달로 적었고, 관제 반영 지연도 최대 312 ms 로 미달입니다. 재시작은 sim 과 시험으로만 확인했습니다.</a:t>
             </a:r>
           </a:p>
           <a:p>
             <a:r>
-              <a:t>(세부: 검출 하중 평균 4.49 N · 2/10 초과(5.15 · 5.29 N), 중지 반응 706 · 600 ms 는 sim 측정(TR-05), 반영 지연 312 ms FAIL, 저장 · 조회 일치는 TR-10 sim. 실기 종단(9/23)은 성공했지만 연속 회차 기록이 없어 "연속"이라고 쓰지 않는다. 438 s 는 #180 학민 코멘트의 실측(이슈 본문 구간 합계는 435 s). [합치기 체크] 용접을 빼면 주황 표 "[뺄 수 있음] 04-⑦ 용접 행"만 지운다)</a:t>
+              <a:t>(세부: 검출 하중 평균 4.49 N · 2/10 초과(5.15 · 5.29 N), 중지 반응 706 · 600 ms 는 sim 측정(TR-05), 반영 지연 312 ms FAIL, 저장 · 조회 일치는 TR-10 sim. 3 회 연속 = 9/23 실기 시연, 팀원 4 명 입회 · 동영상 촬영(GitHub 에는 기록 없음, 튜닝은 PR #179). 438 s 는 #180 학민 코멘트의 실측(이슈 본문 구간 합계는 435 s). [합치기 체크] 용접을 빼면 주황 표 "[뺄 수 있음] 04-⑦ 용접 행"만 지운다)</a:t>
             </a:r>
           </a:p>
         </p:txBody>
@@ -1821,12 +1821,12 @@
           <a:lstStyle/>
           <a:p>
             <a:r>
-              <a:t>일정은 여섯 단계였습니다. 나흘 동안 요구사항과 설계를 정리하고, 9/18 에 노드 사이의 약속을 계약 문서로 동결했습니다. 그 뒤 이틀 동안 각자 모듈을 만들고, 9/21 부터 사흘 동안 통합과 실기를 해서 9/23 에 실기에서 웹까지 이어지는 종단 실행에 성공했습니다. [뺄 수 있음 행] 연휴에는 그 결과로 용접 모션을 이어 붙였습니다. 발표는 오늘입니다.</a:t>
+              <a:t>일정은 여섯 단계였습니다. 나흘 동안 요구사항과 설계를 정리하고, 9/18 에 노드 사이의 약속을 계약 문서로 동결했습니다. 그 뒤 이틀 동안 각자 모듈을 만들고, 9/21 부터 사흘 동안 통합과 실기를 해서 9/23 에 실기에서 웹까지 이어지는 종단 실행을 세 번 연속 성공했습니다. [뺄 수 있음 행] 연휴에는 그 결과로 용접 모션을 이어 붙였습니다. 발표는 오늘입니다.</a:t>
             </a:r>
           </a:p>
           <a:p>
             <a:r>
-              <a:t>(세부: 9/21 저녁 기능 동결 뒤에는 버그 수정만 머지했다. 실기 종단은 연속 회차 기록이 없다. [합치기 체크] 용접을 빼면 주황 행만 지운다)</a:t>
+              <a:t>(세부: 9/21 저녁 기능 동결 뒤에는 버그 수정만 머지했다. 3 회 연속 = 9/23 실기 시연에서 1 회 약 7 분 종단을 팀원 4 명 입회 하에 세 번 연속 성공, 동영상 촬영(슬랙 채널). 그 전 파라미터 튜닝은 PR #179. [합치기 체크] 용접을 빼면 주황 행만 지운다)</a:t>
             </a:r>
           </a:p>
         </p:txBody>
@@ -14836,7 +14836,7 @@
                           <a:latin typeface="맑은 고딕"/>
                           <a:ea typeface="맑은 고딕"/>
                         </a:rPr>
-                        <a:t>실기 종단 성공</a:t>
+                        <a:t>실기 종단 3 회 연속</a:t>
                       </a:r>
                     </a:p>
                   </a:txBody>
@@ -15074,7 +15074,7 @@
                 <a:latin typeface="맑은 고딕"/>
                 <a:ea typeface="맑은 고딕"/>
               </a:rPr>
-              <a:t>출처: docs/presentation/outline-v1.md · docs/conventions.md(9/21 저녁 기능 동결) · PR #179(9/23 실기 종단). 주황 행은 [뺄 수 있음] — 행만 지운다</a:t>
+              <a:t>출처: outline-v1.md · conventions.md(9/21 기능 동결) · PR #179(튜닝) · 9/23 시연 영상(팀원 4 명 입회). 주황 행은 [뺄 수 있음] — 행만 지운다</a:t>
             </a:r>
           </a:p>
         </p:txBody>
@@ -22501,7 +22501,7 @@
                           <a:latin typeface="맑은 고딕"/>
                           <a:ea typeface="맑은 고딕"/>
                         </a:rPr>
-                        <a:t>○ 두 겹 감시 · 래치 · 정지 대응표</a:t>
+                        <a:t>○ 실기 종단 3 회 연속 · 두 겹 감시 · 래치</a:t>
                       </a:r>
                     </a:p>
                     <a:p>
@@ -22536,7 +22536,7 @@
                           <a:latin typeface="맑은 고딕"/>
                           <a:ea typeface="맑은 고딕"/>
                         </a:rPr>
-                        <a:t>04-③ · TR-05</a:t>
+                        <a:t>영상 · 04-③ · TR-05</a:t>
                       </a:r>
                     </a:p>
                   </a:txBody>
@@ -22850,7 +22850,7 @@
                 <a:latin typeface="맑은 고딕"/>
                 <a:ea typeface="맑은 고딕"/>
               </a:rPr>
-              <a:t>출처: deliverables README 5 절 · TR-01(9/23) · TR-05(9/22 sim, 설정 버튼 미구현) · TR-10(9/22 sim) · #180 · PR #179. 438 s = #180 학민 실측(본문 합계 435 s)</a:t>
+              <a:t>출처: TR-01(9/23) · TR-05 · TR-10(9/22 sim) · #180 · 9/23 시연 영상(3 회 연속 · 팀원 입회). 438 s = #180 학민 실측(본문 합계 435 s)</a:t>
             </a:r>
           </a:p>
         </p:txBody>

--- a/docs/presentation/slides-byeonghu.pptx
+++ b/docs/presentation/slides-byeonghu.pptx
@@ -1231,7 +1231,7 @@
           </a:p>
           <a:p>
             <a:r>
-              <a:t>(받으면 채움: 병후 · 학민 · 현지 · 의석의 점수와 이유. 잘한 점 · 아쉬운 점 · 개선점 문장은 사실 기반 초안이라 팀 확인 필요)</a:t>
+              <a:t>(병후 8 / 10 — 이유: 먼저 계약을 확정하고 작업별로 꼼꼼하게 검증한 덕분에 최종 integration 때 시행착오가 적었다. 하지만 이해도가 뒷받침되지 못하고 꼼꼼한 검증 절차로 각 작업의 진행이 지연되었다. 받으면 채움: 학민 · 현지 · 의석의 점수와 이유, 평균. 잘한 점 · 아쉬운 점 · 개선점 문장은 사실 기반 초안이라 팀 확인 필요)</a:t>
             </a:r>
           </a:p>
         </p:txBody>
@@ -1306,7 +1306,7 @@
           </a:p>
           <a:p>
             <a:r>
-              <a:t>(병후 행은 사실 기반 초안 — 병후 확인. 받으면 채움: 학민 · 현지 · 의석의 한 줄 + 운영 · 협업 · 개선 사례 1 개씩)</a:t>
+              <a:t>(병후 행은 병후 확인(9/28). 받으면 채움: 학민 · 현지 · 의석의 한 줄 + 운영 · 협업 · 개선 사례 1 개씩)</a:t>
             </a:r>
           </a:p>
         </p:txBody>
@@ -26873,7 +26873,7 @@
         </p:nvGraphicFramePr>
         <p:xfrm>
           <a:off x="457200" y="2468880"/>
-          <a:ext cx="5486400" cy="2834640"/>
+          <a:ext cx="5486400" cy="2286000"/>
         </p:xfrm>
         <a:graphic>
           <a:graphicData uri="http://schemas.openxmlformats.org/drawingml/2006/table">
@@ -26882,11 +26882,11 @@
                 <a:tableStyleId>{5C22544A-7EE6-4342-B048-85BDC9FD1C3A}</a:tableStyleId>
               </a:tblPr>
               <a:tblGrid>
-                <a:gridCol w="1234440"/>
-                <a:gridCol w="1600200"/>
-                <a:gridCol w="2651760"/>
+                <a:gridCol w="1097280"/>
+                <a:gridCol w="868680"/>
+                <a:gridCol w="3520440"/>
               </a:tblGrid>
-              <a:tr h="566928">
+              <a:tr h="457200">
                 <a:tc>
                   <a:txBody>
                     <a:bodyPr wrap="square"/>
@@ -26900,7 +26900,7 @@
                           <a:latin typeface="맑은 고딕"/>
                           <a:ea typeface="맑은 고딕"/>
                         </a:rPr>
-                        <a:t>완성도 (10 점)</a:t>
+                        <a:t>이름</a:t>
                       </a:r>
                     </a:p>
                   </a:txBody>
@@ -26923,7 +26923,7 @@
                           <a:latin typeface="맑은 고딕"/>
                           <a:ea typeface="맑은 고딕"/>
                         </a:rPr>
-                        <a:t>점수</a:t>
+                        <a:t>완성도 /10</a:t>
                       </a:r>
                     </a:p>
                   </a:txBody>
@@ -26957,7 +26957,7 @@
                   </a:tcPr>
                 </a:tc>
               </a:tr>
-              <a:tr h="566928">
+              <a:tr h="457200">
                 <a:tc>
                   <a:txBody>
                     <a:bodyPr wrap="square"/>
@@ -26989,12 +26989,12 @@
                       <a:r>
                         <a:rPr sz="1050" b="0">
                           <a:solidFill>
-                            <a:srgbClr val="D2691E"/>
+                            <a:srgbClr val="262626"/>
                           </a:solidFill>
                           <a:latin typeface="맑은 고딕"/>
                           <a:ea typeface="맑은 고딕"/>
                         </a:rPr>
-                        <a:t>[받으면 채움: 병후]</a:t>
+                        <a:t>8 / 10</a:t>
                       </a:r>
                     </a:p>
                   </a:txBody>
@@ -27012,12 +27012,12 @@
                       <a:r>
                         <a:rPr sz="1050" b="0">
                           <a:solidFill>
-                            <a:srgbClr val="D2691E"/>
+                            <a:srgbClr val="262626"/>
                           </a:solidFill>
                           <a:latin typeface="맑은 고딕"/>
                           <a:ea typeface="맑은 고딕"/>
                         </a:rPr>
-                        <a:t>[받으면 채움: 병후]</a:t>
+                        <a:t>먼저 계약을 확정하고 작업별로 꼼꼼하게 검증한 덕분에 최종 integration 때 시행착오가 적었다. 하지만 이해도가 뒷받침되지 못하고 꼼꼼한 검증 절차로 각 작업의 진행이 지연되었다.</a:t>
                       </a:r>
                     </a:p>
                   </a:txBody>
@@ -27028,7 +27028,7 @@
                   </a:tcPr>
                 </a:tc>
               </a:tr>
-              <a:tr h="566928">
+              <a:tr h="457200">
                 <a:tc>
                   <a:txBody>
                     <a:bodyPr wrap="square"/>
@@ -27065,7 +27065,7 @@
                           <a:latin typeface="맑은 고딕"/>
                           <a:ea typeface="맑은 고딕"/>
                         </a:rPr>
-                        <a:t>[받으면 채움: 학민]</a:t>
+                        <a:t>[받으면]</a:t>
                       </a:r>
                     </a:p>
                   </a:txBody>
@@ -27099,7 +27099,7 @@
                   </a:tcPr>
                 </a:tc>
               </a:tr>
-              <a:tr h="566928">
+              <a:tr h="457200">
                 <a:tc>
                   <a:txBody>
                     <a:bodyPr wrap="square"/>
@@ -27136,7 +27136,7 @@
                           <a:latin typeface="맑은 고딕"/>
                           <a:ea typeface="맑은 고딕"/>
                         </a:rPr>
-                        <a:t>[받으면 채움: 현지]</a:t>
+                        <a:t>[받으면]</a:t>
                       </a:r>
                     </a:p>
                   </a:txBody>
@@ -27170,7 +27170,7 @@
                   </a:tcPr>
                 </a:tc>
               </a:tr>
-              <a:tr h="566928">
+              <a:tr h="457200">
                 <a:tc>
                   <a:txBody>
                     <a:bodyPr wrap="square"/>
@@ -27207,7 +27207,7 @@
                           <a:latin typeface="맑은 고딕"/>
                           <a:ea typeface="맑은 고딕"/>
                         </a:rPr>
-                        <a:t>[받으면 채움: 의석]</a:t>
+                        <a:t>[받으면]</a:t>
                       </a:r>
                     </a:p>
                   </a:txBody>
@@ -27339,7 +27339,7 @@
                 <a:latin typeface="맑은 고딕"/>
                 <a:ea typeface="맑은 고딕"/>
               </a:rPr>
-              <a:t>· 계약을 먼저 얼려 네 명이 병렬로 만들었고, 9/23 실기에서 웹 → ROS → 웹이 이어졌다</a:t>
+              <a:t>· 계약을 먼저 동결해 네 명이 병렬로 만들었고, 9/23 실기에서 웹 → ROS → 웹이 이어졌다</a:t>
             </a:r>
           </a:p>
           <a:p>
@@ -28421,18 +28421,6 @@
                         <a:t>박병후</a:t>
                       </a:r>
                     </a:p>
-                    <a:p>
-                      <a:r>
-                        <a:rPr sz="1000" b="1">
-                          <a:solidFill>
-                            <a:srgbClr val="262626"/>
-                          </a:solidFill>
-                          <a:latin typeface="맑은 고딕"/>
-                          <a:ea typeface="맑은 고딕"/>
-                        </a:rPr>
-                        <a:t>(초안)</a:t>
-                      </a:r>
-                    </a:p>
                   </a:txBody>
                   <a:tcPr marL="73152" marR="73152" marT="27432" marB="27432" anchor="ctr">
                     <a:solidFill>
@@ -28923,7 +28911,7 @@
                 <a:latin typeface="맑은 고딕"/>
                 <a:ea typeface="맑은 고딕"/>
               </a:rPr>
-              <a:t>출처: docs/contracts/CHANGELOG.md · docs/contracts/mqtt-schema.md 상태 줄(T01 1 차 회의 병후 · 의석) · PR #136. 병후 행은 초안(병후 확인), 나머지는 받으면 채움</a:t>
+              <a:t>출처: docs/contracts/CHANGELOG.md · docs/contracts/mqtt-schema.md 상태 줄(T01 1 차 회의 병후 · 의석) · PR #136. 병후 행은 병후 확인(9/28), 나머지는 받으면 채움</a:t>
             </a:r>
           </a:p>
         </p:txBody>

--- a/docs/presentation/slides-byeonghu.pptx
+++ b/docs/presentation/slides-byeonghu.pptx
@@ -926,7 +926,7 @@
           <a:lstStyle/>
           <a:p>
             <a:r>
-              <a:t>평가 기준 다섯 항목에 저희가 한 것과 증거를 붙였습니다. 동그라미는 된 것, 가위표는 목표에 못 미친 것입니다. 기능은 교시 없이 형상까지 나오고, 9/23 실기에서는 약 7 분짜리 종단을 세 번 연속 성공했습니다. 치수도 목표 안이지만, 탐색 시간은 438 초로 목표의 3.6 배이고 설정 등록 버튼은 아직 화면에 없습니다. 검출 하중은 평균만 보면 통과지만 열 번 중 두 번이 5 N 을 넘어 미달로 적었고, 관제 반영 지연도 최대 312 ms 로 미달입니다. 재시작은 sim 과 시험으로만 확인했습니다.</a:t>
+              <a:t>평가 기준 다섯 항목에 저희가 한 것과 증거를 붙였습니다. 동그라미는 된 것, 가위표는 목표에 못 미친 것입니다. 기능은 교시 없이 형상까지 나오고, 9/23 실기에서는 약 7 분짜리 종단을 세 번 연속 성공했습니다. 치수도 목표 안이지만, 탐색 시간은 438 초로 목표의 3.6 배이고 설정 등록 버튼은 아직 화면에 없습니다. 검출 하중은 평균만 보면 통과지만 열 번 중 두 번이 5 N 을 넘어 미달로 적었고, 관제 반영 지연도 최대 312 ms 로 미달입니다. 재시작은 sim 과 시험으로만 확인했습니다. 9/29 같은 배치에서 스캔을 다시 했을 때는 세 번 모두 한 방향에서 실패해 원인을 찾고 있습니다.</a:t>
             </a:r>
           </a:p>
           <a:p>
@@ -1151,12 +1151,12 @@
           <a:lstStyle/>
           <a:p>
             <a:r>
-              <a:t>용접 쪽 결과입니다. 9/23 실기에서 기울인 자세의 도달성을 먼저 쟀는데, 16 자세 중 12 개에 닿았고 L1 · L5 두 선은 로봇 팔 길이가 모자라 닿지 않았습니다. 그래서 한 선이 실패해도 그 선만 실패로 남기고 다음 선으로 가게 만들었습니다. 에뮬레이터에서는 여덟 선을 모두 끝까지 돌았고, 실기 결과는 9/29 에 [여기에 채웁니다].</a:t>
+              <a:t>용접 쪽 결과입니다. 9/23 실기에서 기울인 자세의 도달성을 먼저 쟀는데, 16 자세 중 12 개에 닿았고 L1 · L5 두 선은 로봇 팔 길이가 모자라 닿지 않았습니다. 그래서 한 선이 실패해도 그 선만 실패로 남기고 다음 선으로 가게 만들었습니다. 에뮬레이터에서는 여덟 선을 모두 끝까지 돌았습니다. 9/29 실기에서는 여덟 선 중 여섯 선을 끝까지 따라갔고, 닿지 않는 두 선은 계획대로 실패로 기록한 뒤 다음 선으로 넘어갔습니다. 한 바퀴에 2 분 24 초, 닿거나 멈춘 일은 없었습니다. 다만 3 mm 띄운 거리가 선마다 0 에서 8 mm 로 달라 보여, 한쪽으로 3~4 mm 치우친 것을 다음 과제로 남겼습니다.</a:t>
             </a:r>
           </a:p>
           <a:p>
             <a:r>
-              <a:t>(세부: M1 도달 자세 위치 오차 최대 0.14 mm, 45° 도달 한계는 플랜지 거리 689~761 mm 사이, L1 · L5 는 761 · 762 mm. 세로 아래 4 자세는 계약 z 104.13 이 아니라 121.25 mm 에서 확인했다(계약 z 는 9/29). Virtual 은 sim 가상 박스 100 × 60 × 40 mm 입력이고 L7 강제 실패 시험에서 FAILED 기록 → 마무리 복귀 → DONE(success=false). 9/29 순서: 실기 스캔 1 회 → Virtual 종단 → 윗면 L0(기울임 0 → 45°) → L0~L3 → 조건부로 세로선 · 위빙. 구현 PR(#191 · #195~#197)은 9/28 기준 머지 전. 9/29 채움: 윗면 1 단계 성공 여부 · 완주 선 수 · 도착 오차 · 무접촉. 성사되지 않으면 04-⑨ 두 장을 통째로 뺀다)</a:t>
+              <a:t>(세부: M1 도달 자세 위치 오차 최대 0.14 mm, 45° 도달 한계는 플랜지 거리 689~761 mm 사이, L1 · L5 는 761 · 762 mm. 세로 아래 4 자세는 계약 z 104.13 이 아니라 121.25 mm 에서 확인했다(계약 z 는 9/29). Virtual 은 sim 가상 박스 100 × 60 × 40 mm 입력이고 L7 강제 실패 시험에서 FAILED 기록 → 마무리 복귀 → DONE(success=false). 9/29 순서: 실기 스캔 1 회 → Virtual 종단 → 윗면 L0(기울임 0 → 45°) → L0~L3 → 조건부로 세로선 · 위빙. 9/29 실기(명령 현지 · 입회 학민): 기준점 점검 −0.016 mm 통과. 접근 · 후퇴점 도달성(D34)에서 L6 접근점이 도달 불가(알람 1206) → 윗면선 오프셋을 수직으로 · z_safe 32.5 mm · L6 · L7 툴 roll 180 으로 바꿔 L6 을 살렸다(#210). 툴 치수 M2 13 / 12 / 12 mm. 입력은 9/23 실기 스캔 — 9/29 실기 스캔은 3 회 모두 한 방향(NEG_Y)에서 실패했고, 잡힌 세 변이 9/23 과 1 mm 안이라 배치가 같음을 확인했다. 점마다 멈추는 비용 0.5 s. 위빙 L3 · L7 도 완주. 경유점 도착은 robot_manager 가 점마다 3 mm 안을 확인. 띄움 거리 0~8 mm 는 눈 관찰(현지 · 학민)이고 실측이 아니다. 한 번은 웹의 스캔 중지 버튼이 눌려 용접이 멈췄고(D25, 요청하지 않은 정지 = ERROR) 안전복귀로 정상 복귀. 구현 PR #191 · #195~#197 은 9/29 머지)</a:t>
             </a:r>
           </a:p>
         </p:txBody>
@@ -22777,7 +22777,7 @@
                           <a:latin typeface="맑은 고딕"/>
                           <a:ea typeface="맑은 고딕"/>
                         </a:rPr>
-                        <a:t>8 선 용접 모션 — Virtual 8 / 8 완주, 실기는 9/29</a:t>
+                        <a:t>○ 실기 8 선 중 6 선 완주 (9/29) · Virtual 8 / 8   △ 띄움 거리 치우침</a:t>
                       </a:r>
                     </a:p>
                   </a:txBody>
@@ -22800,7 +22800,7 @@
                           <a:latin typeface="맑은 고딕"/>
                           <a:ea typeface="맑은 고딕"/>
                         </a:rPr>
-                        <a:t>PR #197 (머지 전)</a:t>
+                        <a:t>04-⑨ · 9/29 기록</a:t>
                       </a:r>
                     </a:p>
                   </a:txBody>
@@ -25335,7 +25335,7 @@
                   </a:solidFill>
                   <a:latin typeface="+mn-ea"/>
                 </a:rPr>
-                <a:t>지금까지는 Virtual 과 자세 도달성까지 — 실기 결과는 9/29 에 채운다</a:t>
+                <a:t>9/29 실기: 8 선 중 6 선 완주 — 닿지 않는 두 선은 계획대로 건너뛰었다</a:t>
               </a:r>
             </a:p>
           </p:txBody>
@@ -25567,7 +25567,7 @@
         </p:nvGraphicFramePr>
         <p:xfrm>
           <a:off x="457200" y="2286000"/>
-          <a:ext cx="11274552" cy="3968496"/>
+          <a:ext cx="11274552" cy="4023360"/>
         </p:xfrm>
         <a:graphic>
           <a:graphicData uri="http://schemas.openxmlformats.org/drawingml/2006/table">
@@ -25580,7 +25580,7 @@
                 <a:gridCol w="2560320"/>
                 <a:gridCol w="5330952"/>
               </a:tblGrid>
-              <a:tr h="566928">
+              <a:tr h="502920">
                 <a:tc>
                   <a:txBody>
                     <a:bodyPr wrap="square"/>
@@ -25651,14 +25651,14 @@
                   </a:tcPr>
                 </a:tc>
               </a:tr>
-              <a:tr h="566928">
+              <a:tr h="502920">
                 <a:tc>
                   <a:txBody>
                     <a:bodyPr wrap="square"/>
                     <a:lstStyle/>
                     <a:p>
                       <a:r>
-                        <a:rPr sz="1700" b="1">
+                        <a:rPr sz="1600" b="1">
                           <a:solidFill>
                             <a:srgbClr val="262626"/>
                           </a:solidFill>
@@ -25681,7 +25681,7 @@
                     <a:lstStyle/>
                     <a:p>
                       <a:r>
-                        <a:rPr sz="1700" b="0">
+                        <a:rPr sz="1600" b="0">
                           <a:solidFill>
                             <a:srgbClr val="262626"/>
                           </a:solidFill>
@@ -25704,7 +25704,7 @@
                     <a:lstStyle/>
                     <a:p>
                       <a:r>
-                        <a:rPr sz="1700" b="0">
+                        <a:rPr sz="1600" b="0">
                           <a:solidFill>
                             <a:srgbClr val="262626"/>
                           </a:solidFill>
@@ -25722,14 +25722,14 @@
                   </a:tcPr>
                 </a:tc>
               </a:tr>
-              <a:tr h="566928">
+              <a:tr h="502920">
                 <a:tc>
                   <a:txBody>
                     <a:bodyPr wrap="square"/>
                     <a:lstStyle/>
                     <a:p>
                       <a:r>
-                        <a:rPr sz="1700" b="1">
+                        <a:rPr sz="1600" b="1">
                           <a:solidFill>
                             <a:srgbClr val="262626"/>
                           </a:solidFill>
@@ -25752,7 +25752,7 @@
                     <a:lstStyle/>
                     <a:p>
                       <a:r>
-                        <a:rPr sz="1700" b="0">
+                        <a:rPr sz="1600" b="0">
                           <a:solidFill>
                             <a:srgbClr val="262626"/>
                           </a:solidFill>
@@ -25775,7 +25775,7 @@
                     <a:lstStyle/>
                     <a:p>
                       <a:r>
-                        <a:rPr sz="1700" b="0">
+                        <a:rPr sz="1600" b="0">
                           <a:solidFill>
                             <a:srgbClr val="262626"/>
                           </a:solidFill>
@@ -25793,14 +25793,14 @@
                   </a:tcPr>
                 </a:tc>
               </a:tr>
-              <a:tr h="566928">
+              <a:tr h="502920">
                 <a:tc>
                   <a:txBody>
                     <a:bodyPr wrap="square"/>
                     <a:lstStyle/>
                     <a:p>
                       <a:r>
-                        <a:rPr sz="1700" b="1">
+                        <a:rPr sz="1600" b="1">
                           <a:solidFill>
                             <a:srgbClr val="262626"/>
                           </a:solidFill>
@@ -25823,7 +25823,7 @@
                     <a:lstStyle/>
                     <a:p>
                       <a:r>
-                        <a:rPr sz="1700" b="0">
+                        <a:rPr sz="1600" b="0">
                           <a:solidFill>
                             <a:srgbClr val="262626"/>
                           </a:solidFill>
@@ -25846,7 +25846,7 @@
                     <a:lstStyle/>
                     <a:p>
                       <a:r>
-                        <a:rPr sz="1700" b="0">
+                        <a:rPr sz="1600" b="0">
                           <a:solidFill>
                             <a:srgbClr val="262626"/>
                           </a:solidFill>
@@ -25864,14 +25864,14 @@
                   </a:tcPr>
                 </a:tc>
               </a:tr>
-              <a:tr h="566928">
+              <a:tr h="502920">
                 <a:tc>
                   <a:txBody>
                     <a:bodyPr wrap="square"/>
                     <a:lstStyle/>
                     <a:p>
                       <a:r>
-                        <a:rPr sz="1700" b="1">
+                        <a:rPr sz="1600" b="1">
                           <a:solidFill>
                             <a:srgbClr val="262626"/>
                           </a:solidFill>
@@ -25884,7 +25884,7 @@
                   </a:txBody>
                   <a:tcPr marL="73152" marR="73152" marT="27432" marB="27432" anchor="ctr">
                     <a:solidFill>
-                      <a:srgbClr val="FFF1E0"/>
+                      <a:srgbClr val="F2F5FA"/>
                     </a:solidFill>
                   </a:tcPr>
                 </a:tc>
@@ -25894,7 +25894,7 @@
                     <a:lstStyle/>
                     <a:p>
                       <a:r>
-                        <a:rPr sz="1700" b="0">
+                        <a:rPr sz="1600" b="0">
                           <a:solidFill>
                             <a:srgbClr val="262626"/>
                           </a:solidFill>
@@ -25907,7 +25907,7 @@
                   </a:txBody>
                   <a:tcPr marL="73152" marR="73152" marT="27432" marB="27432" anchor="ctr">
                     <a:solidFill>
-                      <a:srgbClr val="FFF1E0"/>
+                      <a:srgbClr val="F2F5FA"/>
                     </a:solidFill>
                   </a:tcPr>
                 </a:tc>
@@ -25917,32 +25917,32 @@
                     <a:lstStyle/>
                     <a:p>
                       <a:r>
-                        <a:rPr sz="1700" b="0">
+                        <a:rPr sz="1600" b="0">
                           <a:solidFill>
-                            <a:srgbClr val="D2691E"/>
+                            <a:srgbClr val="262626"/>
                           </a:solidFill>
                           <a:latin typeface="맑은 고딕"/>
                           <a:ea typeface="맑은 고딕"/>
                         </a:rPr>
-                        <a:t>[9/29 채움]</a:t>
+                        <a:t>3 / 4 ○   (L1 은 FAILED 뒤 계속)</a:t>
                       </a:r>
                     </a:p>
                   </a:txBody>
                   <a:tcPr marL="73152" marR="73152" marT="27432" marB="27432" anchor="ctr">
                     <a:solidFill>
-                      <a:srgbClr val="FFF1E0"/>
+                      <a:srgbClr val="F2F5FA"/>
                     </a:solidFill>
                   </a:tcPr>
                 </a:tc>
               </a:tr>
-              <a:tr h="566928">
+              <a:tr h="502920">
                 <a:tc>
                   <a:txBody>
                     <a:bodyPr wrap="square"/>
                     <a:lstStyle/>
                     <a:p>
                       <a:r>
-                        <a:rPr sz="1700" b="1">
+                        <a:rPr sz="1600" b="1">
                           <a:solidFill>
                             <a:srgbClr val="262626"/>
                           </a:solidFill>
@@ -25955,7 +25955,7 @@
                   </a:txBody>
                   <a:tcPr marL="73152" marR="73152" marT="27432" marB="27432" anchor="ctr">
                     <a:solidFill>
-                      <a:srgbClr val="FFF1E0"/>
+                      <a:srgbClr val="FFFFFF"/>
                     </a:solidFill>
                   </a:tcPr>
                 </a:tc>
@@ -25965,7 +25965,7 @@
                     <a:lstStyle/>
                     <a:p>
                       <a:r>
-                        <a:rPr sz="1700" b="0">
+                        <a:rPr sz="1600" b="0">
                           <a:solidFill>
                             <a:srgbClr val="262626"/>
                           </a:solidFill>
@@ -25978,7 +25978,7 @@
                   </a:txBody>
                   <a:tcPr marL="73152" marR="73152" marT="27432" marB="27432" anchor="ctr">
                     <a:solidFill>
-                      <a:srgbClr val="FFF1E0"/>
+                      <a:srgbClr val="FFFFFF"/>
                     </a:solidFill>
                   </a:tcPr>
                 </a:tc>
@@ -25988,45 +25988,45 @@
                     <a:lstStyle/>
                     <a:p>
                       <a:r>
-                        <a:rPr sz="1700" b="0">
+                        <a:rPr sz="1600" b="0">
                           <a:solidFill>
-                            <a:srgbClr val="D2691E"/>
+                            <a:srgbClr val="262626"/>
                           </a:solidFill>
                           <a:latin typeface="맑은 고딕"/>
                           <a:ea typeface="맑은 고딕"/>
                         </a:rPr>
-                        <a:t>[9/29 채움]   (기대 6 / 8)</a:t>
+                        <a:t>6 / 8 ○ · 144 s   (L1 · L5 건너뜀)</a:t>
                       </a:r>
                     </a:p>
                   </a:txBody>
                   <a:tcPr marL="73152" marR="73152" marT="27432" marB="27432" anchor="ctr">
                     <a:solidFill>
-                      <a:srgbClr val="FFF1E0"/>
+                      <a:srgbClr val="FFFFFF"/>
                     </a:solidFill>
                   </a:tcPr>
                 </a:tc>
               </a:tr>
-              <a:tr h="566928">
+              <a:tr h="502920">
                 <a:tc>
                   <a:txBody>
                     <a:bodyPr wrap="square"/>
                     <a:lstStyle/>
                     <a:p>
                       <a:r>
-                        <a:rPr sz="1700" b="1">
+                        <a:rPr sz="1600" b="1">
                           <a:solidFill>
                             <a:srgbClr val="262626"/>
                           </a:solidFill>
                           <a:latin typeface="맑은 고딕"/>
                           <a:ea typeface="맑은 고딕"/>
                         </a:rPr>
-                        <a:t>도착 오차 · 무접촉</a:t>
+                        <a:t>도착 · 무접촉</a:t>
                       </a:r>
                     </a:p>
                   </a:txBody>
                   <a:tcPr marL="73152" marR="73152" marT="27432" marB="27432" anchor="ctr">
                     <a:solidFill>
-                      <a:srgbClr val="FFF1E0"/>
+                      <a:srgbClr val="F2F5FA"/>
                     </a:solidFill>
                   </a:tcPr>
                 </a:tc>
@@ -26036,7 +26036,7 @@
                     <a:lstStyle/>
                     <a:p>
                       <a:r>
-                        <a:rPr sz="1700" b="0">
+                        <a:rPr sz="1600" b="0">
                           <a:solidFill>
                             <a:srgbClr val="262626"/>
                           </a:solidFill>
@@ -26049,7 +26049,7 @@
                   </a:txBody>
                   <a:tcPr marL="73152" marR="73152" marT="27432" marB="27432" anchor="ctr">
                     <a:solidFill>
-                      <a:srgbClr val="FFF1E0"/>
+                      <a:srgbClr val="F2F5FA"/>
                     </a:solidFill>
                   </a:tcPr>
                 </a:tc>
@@ -26059,20 +26059,91 @@
                     <a:lstStyle/>
                     <a:p>
                       <a:r>
-                        <a:rPr sz="1700" b="0">
+                        <a:rPr sz="1600" b="0">
                           <a:solidFill>
-                            <a:srgbClr val="D2691E"/>
+                            <a:srgbClr val="262626"/>
                           </a:solidFill>
                           <a:latin typeface="맑은 고딕"/>
                           <a:ea typeface="맑은 고딕"/>
                         </a:rPr>
-                        <a:t>[9/29 채움]</a:t>
+                        <a:t>경유점 3 mm 안 · 무접촉 · 안전 0 건</a:t>
                       </a:r>
                     </a:p>
                   </a:txBody>
                   <a:tcPr marL="73152" marR="73152" marT="27432" marB="27432" anchor="ctr">
                     <a:solidFill>
-                      <a:srgbClr val="FFF1E0"/>
+                      <a:srgbClr val="F2F5FA"/>
+                    </a:solidFill>
+                  </a:tcPr>
+                </a:tc>
+              </a:tr>
+              <a:tr h="502920">
+                <a:tc>
+                  <a:txBody>
+                    <a:bodyPr wrap="square"/>
+                    <a:lstStyle/>
+                    <a:p>
+                      <a:r>
+                        <a:rPr sz="1600" b="1">
+                          <a:solidFill>
+                            <a:srgbClr val="262626"/>
+                          </a:solidFill>
+                          <a:latin typeface="맑은 고딕"/>
+                          <a:ea typeface="맑은 고딕"/>
+                        </a:rPr>
+                        <a:t>3 mm 띄움 (눈 관찰)</a:t>
+                      </a:r>
+                    </a:p>
+                  </a:txBody>
+                  <a:tcPr marL="73152" marR="73152" marT="27432" marB="27432" anchor="ctr">
+                    <a:solidFill>
+                      <a:srgbClr val="FFFFFF"/>
+                    </a:solidFill>
+                  </a:tcPr>
+                </a:tc>
+                <a:tc>
+                  <a:txBody>
+                    <a:bodyPr wrap="square"/>
+                    <a:lstStyle/>
+                    <a:p>
+                      <a:r>
+                        <a:rPr sz="1600" b="0">
+                          <a:solidFill>
+                            <a:srgbClr val="262626"/>
+                          </a:solidFill>
+                          <a:latin typeface="맑은 고딕"/>
+                          <a:ea typeface="맑은 고딕"/>
+                        </a:rPr>
+                        <a:t>실기 · 9/29</a:t>
+                      </a:r>
+                    </a:p>
+                  </a:txBody>
+                  <a:tcPr marL="73152" marR="73152" marT="27432" marB="27432" anchor="ctr">
+                    <a:solidFill>
+                      <a:srgbClr val="FFFFFF"/>
+                    </a:solidFill>
+                  </a:tcPr>
+                </a:tc>
+                <a:tc>
+                  <a:txBody>
+                    <a:bodyPr wrap="square"/>
+                    <a:lstStyle/>
+                    <a:p>
+                      <a:r>
+                        <a:rPr sz="1600" b="0">
+                          <a:solidFill>
+                            <a:srgbClr val="B8860B"/>
+                          </a:solidFill>
+                          <a:latin typeface="맑은 고딕"/>
+                          <a:ea typeface="맑은 고딕"/>
+                        </a:rPr>
+                        <a:t>△ 선마다 0~8 mm (한쪽 치우침)</a:t>
+                      </a:r>
+                    </a:p>
+                  </a:txBody>
+                  <a:tcPr marL="73152" marR="73152" marT="27432" marB="27432" anchor="ctr">
+                    <a:solidFill>
+                      <a:srgbClr val="FFFFFF"/>
                     </a:solidFill>
                   </a:tcPr>
                 </a:tc>
@@ -26116,7 +26187,7 @@
                 <a:latin typeface="맑은 고딕"/>
                 <a:ea typeface="맑은 고딕"/>
               </a:rPr>
-              <a:t>출처: phase2/measurements-20260923.md(M1, 세로 아래 4 자세는 계약 z + 17 mm) · p2-weld-virtual_20260925.md(가상 박스 100×60×40 mm, PR #197 머지 전)</a:t>
+              <a:t>출처: test-reports/realrobot-session_20260929.md(9/29 실기, 입력은 9/23 실기 스캔) · phase2/measurements-20260923.md(M1) · p2-weld-virtual_20260925.md(가상 박스 100×60×40 mm)</a:t>
             </a:r>
           </a:p>
         </p:txBody>
